--- a/lessons/4-5/slides.pptx
+++ b/lessons/4-5/slides.pptx
@@ -10664,7 +10664,7 @@
       </p:sp>
       <p:sp>
         <p:nvSpPr>
-          <p:cNvPr id="20" name="Shape 18"/>
+          <p:cNvPr id="20" name="Text 18"/>
           <p:cNvSpPr/>
           <p:nvPr/>
         </p:nvSpPr>
@@ -10685,33 +10685,7 @@
             <a:solidFill>
               <a:srgbClr val="D6DBDF"/>
             </a:solidFill>
-            <a:prstDash val="solid"/>
           </a:ln>
-          <a:effectLst>
-            <a:outerShdw sx="100000" sy="100000" kx="0" ky="0" algn="bl" rotWithShape="0" blurRad="50800" dist="12700" dir="5400000">
-              <a:srgbClr val="1C2E42">
-                <a:alpha val="10000"/>
-              </a:srgbClr>
-            </a:outerShdw>
-          </a:effectLst>
-        </p:spPr>
-      </p:sp>
-      <p:sp>
-        <p:nvSpPr>
-          <p:cNvPr id="21" name="Text 19"/>
-          <p:cNvSpPr/>
-          <p:nvPr/>
-        </p:nvSpPr>
-        <p:spPr>
-          <a:xfrm>
-            <a:off x="685800" y="1481328"/>
-            <a:ext cx="1447800" cy="384048"/>
-          </a:xfrm>
-          <a:prstGeom prst="rect">
-            <a:avLst/>
-          </a:prstGeom>
-          <a:noFill/>
-          <a:ln/>
         </p:spPr>
         <p:txBody>
           <a:bodyPr wrap="square" rtlCol="0" anchor="ctr"/>
@@ -10721,7 +10695,7 @@
               <a:buNone/>
             </a:pPr>
             <a:r>
-              <a:rPr lang="en-US" sz="900" dirty="0">
+              <a:rPr lang="en-US" sz="900" b="1" dirty="0">
                 <a:solidFill>
                   <a:srgbClr val="17324D"/>
                 </a:solidFill>
@@ -10737,7 +10711,7 @@
       </p:sp>
       <p:sp>
         <p:nvSpPr>
-          <p:cNvPr id="22" name="Shape 20"/>
+          <p:cNvPr id="21" name="Text 19"/>
           <p:cNvSpPr/>
           <p:nvPr/>
         </p:nvSpPr>
@@ -10758,33 +10732,7 @@
             <a:solidFill>
               <a:srgbClr val="D6DBDF"/>
             </a:solidFill>
-            <a:prstDash val="solid"/>
           </a:ln>
-          <a:effectLst>
-            <a:outerShdw sx="100000" sy="100000" kx="0" ky="0" algn="bl" rotWithShape="0" blurRad="50800" dist="12700" dir="5400000">
-              <a:srgbClr val="1C2E42">
-                <a:alpha val="10000"/>
-              </a:srgbClr>
-            </a:outerShdw>
-          </a:effectLst>
-        </p:spPr>
-      </p:sp>
-      <p:sp>
-        <p:nvSpPr>
-          <p:cNvPr id="23" name="Text 21"/>
-          <p:cNvSpPr/>
-          <p:nvPr/>
-        </p:nvSpPr>
-        <p:spPr>
-          <a:xfrm>
-            <a:off x="2453640" y="1481328"/>
-            <a:ext cx="1447800" cy="384048"/>
-          </a:xfrm>
-          <a:prstGeom prst="rect">
-            <a:avLst/>
-          </a:prstGeom>
-          <a:noFill/>
-          <a:ln/>
         </p:spPr>
         <p:txBody>
           <a:bodyPr wrap="square" rtlCol="0" anchor="ctr"/>
@@ -10794,7 +10742,7 @@
               <a:buNone/>
             </a:pPr>
             <a:r>
-              <a:rPr lang="en-US" sz="900" dirty="0">
+              <a:rPr lang="en-US" sz="900" b="1" dirty="0">
                 <a:solidFill>
                   <a:srgbClr val="17324D"/>
                 </a:solidFill>
@@ -10810,7 +10758,7 @@
       </p:sp>
       <p:sp>
         <p:nvSpPr>
-          <p:cNvPr id="24" name="Shape 22"/>
+          <p:cNvPr id="22" name="Text 20"/>
           <p:cNvSpPr/>
           <p:nvPr/>
         </p:nvSpPr>
@@ -10831,33 +10779,7 @@
             <a:solidFill>
               <a:srgbClr val="D6DBDF"/>
             </a:solidFill>
-            <a:prstDash val="solid"/>
           </a:ln>
-          <a:effectLst>
-            <a:outerShdw sx="100000" sy="100000" kx="0" ky="0" algn="bl" rotWithShape="0" blurRad="50800" dist="12700" dir="5400000">
-              <a:srgbClr val="1C2E42">
-                <a:alpha val="10000"/>
-              </a:srgbClr>
-            </a:outerShdw>
-          </a:effectLst>
-        </p:spPr>
-      </p:sp>
-      <p:sp>
-        <p:nvSpPr>
-          <p:cNvPr id="25" name="Text 23"/>
-          <p:cNvSpPr/>
-          <p:nvPr/>
-        </p:nvSpPr>
-        <p:spPr>
-          <a:xfrm>
-            <a:off x="4221480" y="1481328"/>
-            <a:ext cx="1447800" cy="384048"/>
-          </a:xfrm>
-          <a:prstGeom prst="rect">
-            <a:avLst/>
-          </a:prstGeom>
-          <a:noFill/>
-          <a:ln/>
         </p:spPr>
         <p:txBody>
           <a:bodyPr wrap="square" rtlCol="0" anchor="ctr"/>
@@ -10867,7 +10789,7 @@
               <a:buNone/>
             </a:pPr>
             <a:r>
-              <a:rPr lang="en-US" sz="900" dirty="0">
+              <a:rPr lang="en-US" sz="900" b="1" dirty="0">
                 <a:solidFill>
                   <a:srgbClr val="17324D"/>
                 </a:solidFill>
@@ -10883,7 +10805,7 @@
       </p:sp>
       <p:sp>
         <p:nvSpPr>
-          <p:cNvPr id="26" name="Shape 24"/>
+          <p:cNvPr id="23" name="Text 21"/>
           <p:cNvSpPr/>
           <p:nvPr/>
         </p:nvSpPr>
@@ -10904,33 +10826,7 @@
             <a:solidFill>
               <a:srgbClr val="D6DBDF"/>
             </a:solidFill>
-            <a:prstDash val="solid"/>
           </a:ln>
-          <a:effectLst>
-            <a:outerShdw sx="100000" sy="100000" kx="0" ky="0" algn="bl" rotWithShape="0" blurRad="50800" dist="12700" dir="5400000">
-              <a:srgbClr val="1C2E42">
-                <a:alpha val="10000"/>
-              </a:srgbClr>
-            </a:outerShdw>
-          </a:effectLst>
-        </p:spPr>
-      </p:sp>
-      <p:sp>
-        <p:nvSpPr>
-          <p:cNvPr id="27" name="Text 25"/>
-          <p:cNvSpPr/>
-          <p:nvPr/>
-        </p:nvSpPr>
-        <p:spPr>
-          <a:xfrm>
-            <a:off x="685800" y="1975104"/>
-            <a:ext cx="1447800" cy="384048"/>
-          </a:xfrm>
-          <a:prstGeom prst="rect">
-            <a:avLst/>
-          </a:prstGeom>
-          <a:noFill/>
-          <a:ln/>
         </p:spPr>
         <p:txBody>
           <a:bodyPr wrap="square" rtlCol="0" anchor="ctr"/>
@@ -10940,7 +10836,7 @@
               <a:buNone/>
             </a:pPr>
             <a:r>
-              <a:rPr lang="en-US" sz="900" dirty="0">
+              <a:rPr lang="en-US" sz="900" b="1" dirty="0">
                 <a:solidFill>
                   <a:srgbClr val="17324D"/>
                 </a:solidFill>
@@ -10956,7 +10852,7 @@
       </p:sp>
       <p:sp>
         <p:nvSpPr>
-          <p:cNvPr id="28" name="Shape 26"/>
+          <p:cNvPr id="24" name="Shape 22"/>
           <p:cNvSpPr/>
           <p:nvPr/>
         </p:nvSpPr>
@@ -10990,7 +10886,7 @@
       </p:sp>
       <p:sp>
         <p:nvSpPr>
-          <p:cNvPr id="29" name="Text 27"/>
+          <p:cNvPr id="25" name="Text 23"/>
           <p:cNvSpPr/>
           <p:nvPr/>
         </p:nvSpPr>
@@ -11031,7 +10927,7 @@
       </p:sp>
       <p:sp>
         <p:nvSpPr>
-          <p:cNvPr id="30" name="Shape 28"/>
+          <p:cNvPr id="26" name="Shape 24"/>
           <p:cNvSpPr/>
           <p:nvPr/>
         </p:nvSpPr>
@@ -11065,7 +10961,7 @@
       </p:sp>
       <p:sp>
         <p:nvSpPr>
-          <p:cNvPr id="31" name="Text 29"/>
+          <p:cNvPr id="27" name="Text 25"/>
           <p:cNvSpPr/>
           <p:nvPr/>
         </p:nvSpPr>
@@ -11106,7 +11002,7 @@
       </p:sp>
       <p:sp>
         <p:nvSpPr>
-          <p:cNvPr id="32" name="Shape 30"/>
+          <p:cNvPr id="28" name="Shape 26"/>
           <p:cNvSpPr/>
           <p:nvPr/>
         </p:nvSpPr>
@@ -11140,7 +11036,7 @@
       </p:sp>
       <p:sp>
         <p:nvSpPr>
-          <p:cNvPr id="33" name="Text 31"/>
+          <p:cNvPr id="29" name="Text 27"/>
           <p:cNvSpPr/>
           <p:nvPr/>
         </p:nvSpPr>
@@ -11181,7 +11077,7 @@
       </p:sp>
       <p:sp>
         <p:nvSpPr>
-          <p:cNvPr id="34" name="Text 32"/>
+          <p:cNvPr id="30" name="Text 28"/>
           <p:cNvSpPr/>
           <p:nvPr/>
         </p:nvSpPr>
@@ -11220,7 +11116,7 @@
       </p:sp>
       <p:sp>
         <p:nvSpPr>
-          <p:cNvPr id="35" name="Shape 33"/>
+          <p:cNvPr id="31" name="Shape 29"/>
           <p:cNvSpPr/>
           <p:nvPr/>
         </p:nvSpPr>
@@ -11243,7 +11139,7 @@
       </p:sp>
       <p:sp>
         <p:nvSpPr>
-          <p:cNvPr id="36" name="Shape 34"/>
+          <p:cNvPr id="32" name="Shape 30"/>
           <p:cNvSpPr/>
           <p:nvPr/>
         </p:nvSpPr>
@@ -11266,7 +11162,7 @@
       </p:sp>
       <p:sp>
         <p:nvSpPr>
-          <p:cNvPr id="37" name="Shape 35"/>
+          <p:cNvPr id="33" name="Shape 31"/>
           <p:cNvSpPr/>
           <p:nvPr/>
         </p:nvSpPr>
@@ -11289,7 +11185,7 @@
       </p:sp>
       <p:sp>
         <p:nvSpPr>
-          <p:cNvPr id="38" name="Shape 36"/>
+          <p:cNvPr id="34" name="Shape 32"/>
           <p:cNvSpPr/>
           <p:nvPr/>
         </p:nvSpPr>
@@ -11312,7 +11208,7 @@
       </p:sp>
       <p:sp>
         <p:nvSpPr>
-          <p:cNvPr id="39" name="Shape 37"/>
+          <p:cNvPr id="35" name="Shape 33"/>
           <p:cNvSpPr/>
           <p:nvPr/>
         </p:nvSpPr>

--- a/lessons/4-5/slides.pptx
+++ b/lessons/4-5/slides.pptx
@@ -2495,7 +2495,7 @@
                 <a:ea typeface="Outfit" pitchFamily="34" charset="-122"/>
                 <a:cs typeface="Outfit" pitchFamily="34" charset="-120"/>
               </a:rPr>
-              <a:t>6.RP.3c</a:t>
+              <a:t>6.AT.4</a:t>
             </a:r>
             <a:endParaRPr lang="en-US" sz="1000" dirty="0"/>
           </a:p>
@@ -3218,7 +3218,7 @@
                 <a:ea typeface="Outfit" pitchFamily="34" charset="-122"/>
                 <a:cs typeface="Outfit" pitchFamily="34" charset="-120"/>
               </a:rPr>
-              <a:t>6.RP.3c</a:t>
+              <a:t>6.AT.4</a:t>
             </a:r>
             <a:endParaRPr lang="en-US" sz="900" dirty="0"/>
           </a:p>
@@ -4328,7 +4328,7 @@
                 <a:ea typeface="Outfit" pitchFamily="34" charset="-122"/>
                 <a:cs typeface="Outfit" pitchFamily="34" charset="-120"/>
               </a:rPr>
-              <a:t>6.RP.3c</a:t>
+              <a:t>6.AT.4</a:t>
             </a:r>
             <a:endParaRPr lang="en-US" sz="900" dirty="0"/>
           </a:p>
@@ -5664,7 +5664,7 @@
                 <a:ea typeface="Outfit" pitchFamily="34" charset="-122"/>
                 <a:cs typeface="Outfit" pitchFamily="34" charset="-120"/>
               </a:rPr>
-              <a:t>6.RP.3c</a:t>
+              <a:t>6.AT.4</a:t>
             </a:r>
             <a:endParaRPr lang="en-US" sz="900" dirty="0"/>
           </a:p>
@@ -6860,7 +6860,7 @@
                 <a:ea typeface="Outfit" pitchFamily="34" charset="-122"/>
                 <a:cs typeface="Outfit" pitchFamily="34" charset="-120"/>
               </a:rPr>
-              <a:t>6.RP.3c</a:t>
+              <a:t>6.AT.4</a:t>
             </a:r>
             <a:endParaRPr lang="en-US" sz="900" dirty="0"/>
           </a:p>
@@ -7922,7 +7922,7 @@
                 <a:ea typeface="Outfit" pitchFamily="34" charset="-122"/>
                 <a:cs typeface="Outfit" pitchFamily="34" charset="-120"/>
               </a:rPr>
-              <a:t>6.RP.3c</a:t>
+              <a:t>6.AT.4</a:t>
             </a:r>
             <a:endParaRPr lang="en-US" sz="900" dirty="0"/>
           </a:p>
@@ -8887,7 +8887,7 @@
                 <a:ea typeface="Outfit" pitchFamily="34" charset="-122"/>
                 <a:cs typeface="Outfit" pitchFamily="34" charset="-120"/>
               </a:rPr>
-              <a:t>6.RP.3c</a:t>
+              <a:t>6.AT.4</a:t>
             </a:r>
             <a:endParaRPr lang="en-US" sz="900" dirty="0"/>
           </a:p>
@@ -9804,7 +9804,7 @@
                 <a:ea typeface="Outfit" pitchFamily="34" charset="-122"/>
                 <a:cs typeface="Outfit" pitchFamily="34" charset="-120"/>
               </a:rPr>
-              <a:t>6.RP.3c</a:t>
+              <a:t>6.AT.4</a:t>
             </a:r>
             <a:endParaRPr lang="en-US" sz="900" dirty="0"/>
           </a:p>
@@ -10932,7 +10932,7 @@
                 <a:ea typeface="Outfit" pitchFamily="34" charset="-122"/>
                 <a:cs typeface="Outfit" pitchFamily="34" charset="-120"/>
               </a:rPr>
-              <a:t>6.RP.3c</a:t>
+              <a:t>6.AT.4</a:t>
             </a:r>
             <a:endParaRPr lang="en-US" sz="900" dirty="0"/>
           </a:p>
@@ -12365,7 +12365,7 @@
                 <a:ea typeface="Outfit" pitchFamily="34" charset="-122"/>
                 <a:cs typeface="Outfit" pitchFamily="34" charset="-120"/>
               </a:rPr>
-              <a:t>6.RP.3c</a:t>
+              <a:t>6.AT.4</a:t>
             </a:r>
             <a:endParaRPr lang="en-US" sz="900" dirty="0"/>
           </a:p>
@@ -13179,7 +13179,7 @@
                 <a:ea typeface="Outfit" pitchFamily="34" charset="-122"/>
                 <a:cs typeface="Outfit" pitchFamily="34" charset="-120"/>
               </a:rPr>
-              <a:t>6.RP.3c</a:t>
+              <a:t>6.AT.4</a:t>
             </a:r>
             <a:endParaRPr lang="en-US" sz="900" dirty="0"/>
           </a:p>
@@ -14286,7 +14286,7 @@
                 <a:ea typeface="Outfit" pitchFamily="34" charset="-122"/>
                 <a:cs typeface="Outfit" pitchFamily="34" charset="-120"/>
               </a:rPr>
-              <a:t>6.RP.3c</a:t>
+              <a:t>6.AT.4</a:t>
             </a:r>
             <a:endParaRPr lang="en-US" sz="900" dirty="0"/>
           </a:p>
@@ -15346,7 +15346,7 @@
                 <a:ea typeface="Outfit" pitchFamily="34" charset="-122"/>
                 <a:cs typeface="Outfit" pitchFamily="34" charset="-120"/>
               </a:rPr>
-              <a:t>6.RP.3c</a:t>
+              <a:t>6.AT.4</a:t>
             </a:r>
             <a:endParaRPr lang="en-US" sz="900" dirty="0"/>
           </a:p>
@@ -16406,7 +16406,7 @@
                 <a:ea typeface="Outfit" pitchFamily="34" charset="-122"/>
                 <a:cs typeface="Outfit" pitchFamily="34" charset="-120"/>
               </a:rPr>
-              <a:t>6.RP.3c</a:t>
+              <a:t>6.AT.4</a:t>
             </a:r>
             <a:endParaRPr lang="en-US" sz="900" dirty="0"/>
           </a:p>
@@ -17466,7 +17466,7 @@
                 <a:ea typeface="Outfit" pitchFamily="34" charset="-122"/>
                 <a:cs typeface="Outfit" pitchFamily="34" charset="-120"/>
               </a:rPr>
-              <a:t>6.RP.3c</a:t>
+              <a:t>6.AT.4</a:t>
             </a:r>
             <a:endParaRPr lang="en-US" sz="900" dirty="0"/>
           </a:p>
@@ -18434,7 +18434,7 @@
                 <a:ea typeface="Outfit" pitchFamily="34" charset="-122"/>
                 <a:cs typeface="Outfit" pitchFamily="34" charset="-120"/>
               </a:rPr>
-              <a:t>6.RP.3c</a:t>
+              <a:t>6.AT.4</a:t>
             </a:r>
             <a:endParaRPr lang="en-US" sz="900" dirty="0"/>
           </a:p>
@@ -20372,7 +20372,7 @@
                 <a:ea typeface="Outfit" pitchFamily="34" charset="-122"/>
                 <a:cs typeface="Outfit" pitchFamily="34" charset="-120"/>
               </a:rPr>
-              <a:t>6.RP.3c</a:t>
+              <a:t>6.AT.4</a:t>
             </a:r>
             <a:endParaRPr lang="en-US" sz="900" dirty="0"/>
           </a:p>
